--- a/tests/golden/visual/composition/v23_narrative_opening/deck.pptx
+++ b/tests/golden/visual/composition/v23_narrative_opening/deck.pptx
@@ -949,7 +949,7 @@
         <p:spPr>
           <a:xfrm>
             <a:off x="640080" y="1088898"/>
-            <a:ext cx="4241292" cy="3067050"/>
+            <a:ext cx="3855720" cy="3204210"/>
           </a:xfrm>
           <a:prstGeom prst="rect">
             <a:avLst/>
@@ -973,8 +973,8 @@
         </p:nvSpPr>
         <p:spPr>
           <a:xfrm>
-            <a:off x="777240" y="2439543"/>
-            <a:ext cx="3966972" cy="365760"/>
+            <a:off x="777240" y="2508123"/>
+            <a:ext cx="3581400" cy="365760"/>
           </a:xfrm>
           <a:prstGeom prst="rect">
             <a:avLst/>
@@ -1012,8 +1012,8 @@
         </p:nvSpPr>
         <p:spPr>
           <a:xfrm>
-            <a:off x="5033772" y="1088898"/>
-            <a:ext cx="3470148" cy="971550"/>
+            <a:off x="4648200" y="1088898"/>
+            <a:ext cx="3855720" cy="1017270"/>
           </a:xfrm>
           <a:prstGeom prst="rect">
             <a:avLst/>
@@ -1068,8 +1068,8 @@
         </p:nvSpPr>
         <p:spPr>
           <a:xfrm>
-            <a:off x="5033772" y="2136648"/>
-            <a:ext cx="3470148" cy="971550"/>
+            <a:off x="4648200" y="2182368"/>
+            <a:ext cx="3855720" cy="1017270"/>
           </a:xfrm>
           <a:prstGeom prst="rect">
             <a:avLst/>
@@ -1124,8 +1124,8 @@
         </p:nvSpPr>
         <p:spPr>
           <a:xfrm>
-            <a:off x="5033772" y="3184398"/>
-            <a:ext cx="3470148" cy="971550"/>
+            <a:off x="4648200" y="3275838"/>
+            <a:ext cx="3855720" cy="1017270"/>
           </a:xfrm>
           <a:prstGeom prst="rect">
             <a:avLst/>
